--- a/Презентация_SAG.pptx
+++ b/Презентация_SAG.pptx
@@ -317,7 +317,7 @@
           <a:p>
             <a:fld id="{5BCAD085-E8A6-8845-BD4E-CB4CCA059FC4}" type="datetimeFigureOut">
               <a:rPr lang="en-US" smtClean="0"/>
-              <a:t>9/16/2026</a:t>
+              <a:t>9/17/2026</a:t>
             </a:fld>
             <a:endParaRPr lang="en-US"/>
           </a:p>
@@ -485,7 +485,7 @@
           <a:p>
             <a:fld id="{5BCAD085-E8A6-8845-BD4E-CB4CCA059FC4}" type="datetimeFigureOut">
               <a:rPr lang="en-US" smtClean="0"/>
-              <a:t>9/16/2026</a:t>
+              <a:t>9/17/2026</a:t>
             </a:fld>
             <a:endParaRPr lang="en-US"/>
           </a:p>
@@ -663,7 +663,7 @@
           <a:p>
             <a:fld id="{5BCAD085-E8A6-8845-BD4E-CB4CCA059FC4}" type="datetimeFigureOut">
               <a:rPr lang="en-US" smtClean="0"/>
-              <a:t>9/16/2026</a:t>
+              <a:t>9/17/2026</a:t>
             </a:fld>
             <a:endParaRPr lang="en-US"/>
           </a:p>
@@ -831,7 +831,7 @@
           <a:p>
             <a:fld id="{5BCAD085-E8A6-8845-BD4E-CB4CCA059FC4}" type="datetimeFigureOut">
               <a:rPr lang="en-US" smtClean="0"/>
-              <a:t>9/16/2026</a:t>
+              <a:t>9/17/2026</a:t>
             </a:fld>
             <a:endParaRPr lang="en-US"/>
           </a:p>
@@ -1076,7 +1076,7 @@
           <a:p>
             <a:fld id="{5BCAD085-E8A6-8845-BD4E-CB4CCA059FC4}" type="datetimeFigureOut">
               <a:rPr lang="en-US" smtClean="0"/>
-              <a:t>9/16/2026</a:t>
+              <a:t>9/17/2026</a:t>
             </a:fld>
             <a:endParaRPr lang="en-US"/>
           </a:p>
@@ -1361,7 +1361,7 @@
           <a:p>
             <a:fld id="{5BCAD085-E8A6-8845-BD4E-CB4CCA059FC4}" type="datetimeFigureOut">
               <a:rPr lang="en-US" smtClean="0"/>
-              <a:t>9/16/2026</a:t>
+              <a:t>9/17/2026</a:t>
             </a:fld>
             <a:endParaRPr lang="en-US"/>
           </a:p>
@@ -1780,7 +1780,7 @@
           <a:p>
             <a:fld id="{5BCAD085-E8A6-8845-BD4E-CB4CCA059FC4}" type="datetimeFigureOut">
               <a:rPr lang="en-US" smtClean="0"/>
-              <a:t>9/16/2026</a:t>
+              <a:t>9/17/2026</a:t>
             </a:fld>
             <a:endParaRPr lang="en-US"/>
           </a:p>
@@ -1897,7 +1897,7 @@
           <a:p>
             <a:fld id="{5BCAD085-E8A6-8845-BD4E-CB4CCA059FC4}" type="datetimeFigureOut">
               <a:rPr lang="en-US" smtClean="0"/>
-              <a:t>9/16/2026</a:t>
+              <a:t>9/17/2026</a:t>
             </a:fld>
             <a:endParaRPr lang="en-US"/>
           </a:p>
@@ -1992,7 +1992,7 @@
           <a:p>
             <a:fld id="{5BCAD085-E8A6-8845-BD4E-CB4CCA059FC4}" type="datetimeFigureOut">
               <a:rPr lang="en-US" smtClean="0"/>
-              <a:t>9/16/2026</a:t>
+              <a:t>9/17/2026</a:t>
             </a:fld>
             <a:endParaRPr lang="en-US"/>
           </a:p>
@@ -2267,7 +2267,7 @@
           <a:p>
             <a:fld id="{5BCAD085-E8A6-8845-BD4E-CB4CCA059FC4}" type="datetimeFigureOut">
               <a:rPr lang="en-US" smtClean="0"/>
-              <a:t>9/16/2026</a:t>
+              <a:t>9/17/2026</a:t>
             </a:fld>
             <a:endParaRPr lang="en-US"/>
           </a:p>
@@ -2519,7 +2519,7 @@
           <a:p>
             <a:fld id="{5BCAD085-E8A6-8845-BD4E-CB4CCA059FC4}" type="datetimeFigureOut">
               <a:rPr lang="en-US" smtClean="0"/>
-              <a:t>9/16/2026</a:t>
+              <a:t>9/17/2026</a:t>
             </a:fld>
             <a:endParaRPr lang="en-US"/>
           </a:p>
@@ -2730,7 +2730,7 @@
           <a:p>
             <a:fld id="{5BCAD085-E8A6-8845-BD4E-CB4CCA059FC4}" type="datetimeFigureOut">
               <a:rPr lang="en-US" smtClean="0"/>
-              <a:t>9/16/2026</a:t>
+              <a:t>9/17/2026</a:t>
             </a:fld>
             <a:endParaRPr lang="en-US"/>
           </a:p>
@@ -3392,7 +3392,7 @@
         <p:spPr>
           <a:xfrm>
             <a:off x="822960" y="5943600"/>
-            <a:ext cx="7315200" cy="457200"/>
+            <a:ext cx="7315200" cy="307777"/>
           </a:xfrm>
           <a:prstGeom prst="rect">
             <a:avLst/>
@@ -3411,14 +3411,38 @@
               </a:lnSpc>
             </a:pPr>
             <a:r>
-              <a:rPr sz="1400" b="0">
+              <a:rPr sz="1400" b="0" dirty="0" err="1">
                 <a:solidFill>
                   <a:srgbClr val="9FBCDC"/>
                 </a:solidFill>
                 <a:latin typeface="Calibri"/>
               </a:rPr>
-              <a:t>Выполнил: Эркинов Комилжон</a:t>
-            </a:r>
+              <a:t>Выполнил</a:t>
+            </a:r>
+            <a:r>
+              <a:rPr sz="1400" b="0" dirty="0">
+                <a:solidFill>
+                  <a:srgbClr val="9FBCDC"/>
+                </a:solidFill>
+                <a:latin typeface="Calibri"/>
+              </a:rPr>
+              <a:t>: </a:t>
+            </a:r>
+            <a:r>
+              <a:rPr lang="ru-RU" sz="1400" b="0" dirty="0">
+                <a:solidFill>
+                  <a:srgbClr val="9FBCDC"/>
+                </a:solidFill>
+                <a:latin typeface="Calibri"/>
+              </a:rPr>
+              <a:t>Э. К.</a:t>
+            </a:r>
+            <a:endParaRPr sz="1400" b="0" dirty="0">
+              <a:solidFill>
+                <a:srgbClr val="9FBCDC"/>
+              </a:solidFill>
+              <a:latin typeface="Calibri"/>
+            </a:endParaRPr>
           </a:p>
         </p:txBody>
       </p:sp>
@@ -11070,8 +11094,8 @@
         </p:blipFill>
         <p:spPr>
           <a:xfrm>
-            <a:off x="2848076" y="993058"/>
-            <a:ext cx="7328310" cy="5496232"/>
+            <a:off x="2798916" y="1396180"/>
+            <a:ext cx="6594167" cy="4945625"/>
           </a:xfrm>
           <a:prstGeom prst="rect">
             <a:avLst/>
@@ -11092,8 +11116,8 @@
         </p:nvSpPr>
         <p:spPr>
           <a:xfrm>
-            <a:off x="1066800" y="191729"/>
-            <a:ext cx="1781276" cy="584775"/>
+            <a:off x="1066799" y="191729"/>
+            <a:ext cx="5029201" cy="584775"/>
           </a:xfrm>
           <a:prstGeom prst="rect">
             <a:avLst/>
@@ -11118,7 +11142,7 @@
                 </a:solidFill>
                 <a:latin typeface="Calibri"/>
               </a:rPr>
-              <a:t>Обзор</a:t>
+              <a:t>Обзор структуры ковра:</a:t>
             </a:r>
             <a:endParaRPr sz="3200" b="1" dirty="0">
               <a:solidFill>
